--- a/urok19/Урок19_презентация.pptx
+++ b/urok19/Урок19_презентация.pptx
@@ -2833,7 +2833,7 @@
                 <a:ea typeface="Calibri" pitchFamily="34" charset="-122"/>
                 <a:cs typeface="Calibri" pitchFamily="34" charset="-120"/>
               </a:rPr>
-              <a:t>Бустинг (AutoML)</a:t>
+              <a:t>ЛогРег (AutoML)</a:t>
             </a:r>
             <a:endParaRPr lang="en-US" sz="1800" dirty="0"/>
           </a:p>
@@ -2894,7 +2894,7 @@
                 <a:ea typeface="Calibri" pitchFamily="34" charset="-122"/>
                 <a:cs typeface="Calibri" pitchFamily="34" charset="-120"/>
               </a:rPr>
-              <a:t>82.8%</a:t>
+              <a:t>99.4%</a:t>
             </a:r>
             <a:endParaRPr lang="en-US" sz="1800" dirty="0"/>
           </a:p>
@@ -3075,7 +3075,7 @@
                 <a:ea typeface="Calibri" pitchFamily="34" charset="-122"/>
                 <a:cs typeface="Calibri" pitchFamily="34" charset="-120"/>
               </a:rPr>
-              <a:t>80.9%</a:t>
+              <a:t>99.1%</a:t>
             </a:r>
             <a:endParaRPr lang="en-US" sz="1800" dirty="0"/>
           </a:p>
@@ -3195,7 +3195,7 @@
                 <a:ea typeface="Calibri" pitchFamily="34" charset="-122"/>
                 <a:cs typeface="Calibri" pitchFamily="34" charset="-120"/>
               </a:rPr>
-              <a:t>KNN</a:t>
+              <a:t>Extra Trees</a:t>
             </a:r>
             <a:endParaRPr lang="en-US" sz="1800" dirty="0"/>
           </a:p>
@@ -3256,7 +3256,7 @@
                 <a:ea typeface="Calibri" pitchFamily="34" charset="-122"/>
                 <a:cs typeface="Calibri" pitchFamily="34" charset="-120"/>
               </a:rPr>
-              <a:t>80.6%</a:t>
+              <a:t>98.5%</a:t>
             </a:r>
             <a:endParaRPr lang="en-US" sz="1800" dirty="0"/>
           </a:p>
@@ -3437,7 +3437,7 @@
                 <a:ea typeface="Calibri" pitchFamily="34" charset="-122"/>
                 <a:cs typeface="Calibri" pitchFamily="34" charset="-120"/>
               </a:rPr>
-              <a:t>79.0%</a:t>
+              <a:t>97.9%</a:t>
             </a:r>
             <a:endParaRPr lang="en-US" sz="1800" dirty="0"/>
           </a:p>
@@ -3476,7 +3476,7 @@
                 <a:ea typeface="Calibri" pitchFamily="34" charset="-122"/>
                 <a:cs typeface="Calibri" pitchFamily="34" charset="-120"/>
               </a:rPr>
-              <a:t>AutoML часто немного выигрывает — за счёт перебора и ансамблей.</a:t>
+              <a:t>На чистых пингвинах все модели ~99% — AutoML впереди чуть-чуть. Чем больше и грязнее данные, тем заметнее его выигрыш.</a:t>
             </a:r>
             <a:endParaRPr lang="en-US" sz="1600" dirty="0"/>
           </a:p>
